--- a/Topic_B/Exam_Practice/TB-L04_Writing_Workshop_My_Home_Rooms_and_Garden.pptx
+++ b/Topic_B/Exam_Practice/TB-L04_Writing_Workshop_My_Home_Rooms_and_Garden.pptx
@@ -784,7 +784,11 @@
           <a:lstStyle/>
           <a:p>
             <a:r>
-              <a:rPr lang="en-US" dirty="0"/>
+              <a:rPr lang="ar-SA" dirty="0">
+                <a:latin typeface="Amiri" pitchFamily="2" charset="-78"/>
+                <a:ea typeface="Amiri" pitchFamily="2" charset="-78"/>
+                <a:cs typeface="Amiri" pitchFamily="2" charset="-78"/>
+              </a:rPr>
               <a:t>Q3 (3 min to choose and read). Title (أ) suits Core and Develop; title (ب) suits Stretch.</a:t>
             </a:r>
             <a:endParaRPr lang="en-US" dirty="0"/>
@@ -1403,7 +1407,11 @@
           <a:lstStyle/>
           <a:p>
             <a:r>
-              <a:rPr lang="en-US" dirty="0"/>
+              <a:rPr lang="ar-SA" dirty="0">
+                <a:latin typeface="Amiri" pitchFamily="2" charset="-78"/>
+                <a:ea typeface="Amiri" pitchFamily="2" charset="-78"/>
+                <a:cs typeface="Amiri" pitchFamily="2" charset="-78"/>
+              </a:rPr>
               <a:t>WELCOME (1 min) — while students join.
 • Greet each student by name as they arrive: السَّلَامُ عَلَيْكُمْ. Take the register (Pastoral Tracker: attendance 0/1).
 • 2-MINUTE CHECK-IN (SEND training): a private chat to any student who seemed unsettled last lesson — “Are you okay today? 👍 / 👎”.
@@ -1936,7 +1944,11 @@
           <a:lstStyle/>
           <a:p>
             <a:r>
-              <a:rPr lang="en-US" dirty="0"/>
+              <a:rPr lang="ar-SA" dirty="0">
+                <a:latin typeface="Amiri" pitchFamily="2" charset="-78"/>
+                <a:ea typeface="Amiri" pitchFamily="2" charset="-78"/>
+                <a:cs typeface="Amiri" pitchFamily="2" charset="-78"/>
+              </a:rPr>
               <a:t>Question words: أَيْنَ (where) · كَيْفَ (what … like) · صِفْ (describe) · مَاذَا (what) · ادْعُ (invite) — bullet 3 is PAST, bullet 4 ends with an INVITATION.</a:t>
             </a:r>
             <a:endParaRPr lang="en-US" dirty="0"/>
@@ -2508,6 +2520,7 @@
                   <a:srgbClr val="D4AF37"/>
                 </a:solidFill>
                 <a:latin typeface="Amiri" pitchFamily="2" charset="-78"/>
+                <a:ea typeface="Amiri" pitchFamily="2" charset="-78"/>
                 <a:cs typeface="Amiri" pitchFamily="2" charset="-78"/>
               </a:rPr>
               <a:t>م</a:t>
@@ -2714,6 +2727,7 @@
                   <a:srgbClr val="D4AF37"/>
                 </a:solidFill>
                 <a:latin typeface="Amiri" pitchFamily="2" charset="-78"/>
+                <a:ea typeface="Amiri" pitchFamily="2" charset="-78"/>
                 <a:cs typeface="Amiri" pitchFamily="2" charset="-78"/>
               </a:rPr>
               <a:t>وَرْشَةُ الكِتَابَةِ — بَيْتِي</a:t>
@@ -3171,6 +3185,7 @@
                   <a:srgbClr val="D4AF37"/>
                 </a:solidFill>
                 <a:latin typeface="Amiri" pitchFamily="2" charset="-78"/>
+                <a:ea typeface="Amiri" pitchFamily="2" charset="-78"/>
                 <a:cs typeface="Amiri" pitchFamily="2" charset="-78"/>
               </a:rPr>
               <a:t>م</a:t>
@@ -3491,6 +3506,7 @@
                   <a:srgbClr val="8A6D1E"/>
                 </a:solidFill>
                 <a:latin typeface="Amiri" pitchFamily="2" charset="-78"/>
+                <a:ea typeface="Amiri" pitchFamily="2" charset="-78"/>
                 <a:cs typeface="Amiri" pitchFamily="2" charset="-78"/>
               </a:rPr>
               <a:t>نَمُوذَجُ الإِجَابَةِ</a:t>
@@ -3604,6 +3620,7 @@
                   <a:srgbClr val="1F2A37"/>
                 </a:solidFill>
                 <a:latin typeface="Amiri" pitchFamily="2" charset="-78"/>
+                <a:ea typeface="Amiri" pitchFamily="2" charset="-78"/>
                 <a:cs typeface="Amiri" pitchFamily="2" charset="-78"/>
               </a:rPr>
               <a:t>مَرْحَبًا يَا سَلِيمُ،</a:t>
@@ -3623,6 +3640,7 @@
                   <a:srgbClr val="1F2A37"/>
                 </a:solidFill>
                 <a:latin typeface="Amiri" pitchFamily="2" charset="-78"/>
+                <a:ea typeface="Amiri" pitchFamily="2" charset="-78"/>
                 <a:cs typeface="Amiri" pitchFamily="2" charset="-78"/>
               </a:rPr>
               <a:t>كَيْفَ حَالُكَ؟ انْتَقَلْنَا إِلَى بَيْتٍ جَدِيدٍ فِي الأُسْبُوعِ المَاضِي. البَيْتُ كَبِيرٌ وَجَمِيلٌ، وَفِيهِ طَابِقَانِ. فِي الطَّابِقِ الأَرْضِيِّ يُوجَدُ مَطْبَخٌ وَغُرْفَةُ جُلُوسٍ، وَفِي الطَّابِقِ الأَوَّلِ تُوجَدُ ثَلَاثُ غُرَفِ نَوْمٍ. غُرْفَتِي بِجَانِبِ غُرْفَةِ أَخِي، وَهِيَ وَاسِعَةٌ وَمُرِيحَةٌ. تُوجَدُ حَدِيقَةٌ كَبِيرَةٌ خَلْفَ البَيْتِ، وَأَمْسِ لَعِبْتُ فِيهَا كُرَةَ القَدَمِ. أُحِبُّ البَيْتَ، لٰكِنَّهُ بَعِيدٌ عَنِ المَدْرَسَةِ. فِي الصَّيْفِ سَتَزُورُنَا، إِنْ شَاءَ اللّٰهُ!</a:t>
@@ -3642,6 +3660,7 @@
                   <a:srgbClr val="1F2A37"/>
                 </a:solidFill>
                 <a:latin typeface="Amiri" pitchFamily="2" charset="-78"/>
+                <a:ea typeface="Amiri" pitchFamily="2" charset="-78"/>
                 <a:cs typeface="Amiri" pitchFamily="2" charset="-78"/>
               </a:rPr>
               <a:t>مَعَ السَّلَامَةِ،</a:t>
@@ -3661,6 +3680,7 @@
                   <a:srgbClr val="1F2A37"/>
                 </a:solidFill>
                 <a:latin typeface="Amiri" pitchFamily="2" charset="-78"/>
+                <a:ea typeface="Amiri" pitchFamily="2" charset="-78"/>
                 <a:cs typeface="Amiri" pitchFamily="2" charset="-78"/>
               </a:rPr>
               <a:t>فَارِسٌ</a:t>
@@ -3824,11 +3844,12 @@
               <a:buNone/>
             </a:pPr>
             <a:r>
-              <a:rPr lang="en-US" sz="950" b="1" dirty="0">
+              <a:rPr lang="ar-SA" sz="950" b="1" dirty="0">
                 <a:solidFill>
                   <a:srgbClr val="FFFFFF"/>
                 </a:solidFill>
                 <a:latin typeface="Calibri" pitchFamily="34" charset="0"/>
+                <a:ea typeface="Amiri" pitchFamily="2" charset="-78"/>
                 <a:cs typeface="Amiri" pitchFamily="2" charset="-78"/>
               </a:rPr>
               <a:t>فِيهِ طَابِقَانِ</a:t>
@@ -3889,11 +3910,12 @@
               <a:buNone/>
             </a:pPr>
             <a:r>
-              <a:rPr lang="en-US" sz="950" b="1" dirty="0">
+              <a:rPr lang="ar-SA" sz="950" b="1" dirty="0">
                 <a:solidFill>
                   <a:srgbClr val="FFFFFF"/>
                 </a:solidFill>
                 <a:latin typeface="Calibri" pitchFamily="34" charset="0"/>
+                <a:ea typeface="Amiri" pitchFamily="2" charset="-78"/>
                 <a:cs typeface="Amiri" pitchFamily="2" charset="-78"/>
               </a:rPr>
               <a:t>يُوجَدُ مَطْبَخٌ</a:t>
@@ -3954,11 +3976,12 @@
               <a:buNone/>
             </a:pPr>
             <a:r>
-              <a:rPr lang="en-US" sz="950" b="1" dirty="0">
+              <a:rPr lang="ar-SA" sz="950" b="1" dirty="0">
                 <a:solidFill>
                   <a:srgbClr val="FFFFFF"/>
                 </a:solidFill>
                 <a:latin typeface="Calibri" pitchFamily="34" charset="0"/>
+                <a:ea typeface="Amiri" pitchFamily="2" charset="-78"/>
                 <a:cs typeface="Amiri" pitchFamily="2" charset="-78"/>
               </a:rPr>
               <a:t>غُرْفَتِي بِجَانِبِ</a:t>
@@ -4019,11 +4042,12 @@
               <a:buNone/>
             </a:pPr>
             <a:r>
-              <a:rPr lang="en-US" sz="950" b="1" dirty="0">
+              <a:rPr lang="ar-SA" sz="950" b="1" dirty="0">
                 <a:solidFill>
                   <a:srgbClr val="FFFFFF"/>
                 </a:solidFill>
                 <a:latin typeface="Calibri" pitchFamily="34" charset="0"/>
+                <a:ea typeface="Amiri" pitchFamily="2" charset="-78"/>
                 <a:cs typeface="Amiri" pitchFamily="2" charset="-78"/>
               </a:rPr>
               <a:t>خَلْفَ البَيْتِ</a:t>
@@ -4157,6 +4181,7 @@
                   <a:srgbClr val="D4AF37"/>
                 </a:solidFill>
                 <a:latin typeface="Amiri" pitchFamily="2" charset="-78"/>
+                <a:ea typeface="Amiri" pitchFamily="2" charset="-78"/>
                 <a:cs typeface="Amiri" pitchFamily="2" charset="-78"/>
               </a:rPr>
               <a:t>م</a:t>
@@ -4477,6 +4502,7 @@
                   <a:srgbClr val="8A6D1E"/>
                 </a:solidFill>
                 <a:latin typeface="Amiri" pitchFamily="2" charset="-78"/>
+                <a:ea typeface="Amiri" pitchFamily="2" charset="-78"/>
                 <a:cs typeface="Amiri" pitchFamily="2" charset="-78"/>
               </a:rPr>
               <a:t>نَمُوذَجُ الإِجَابَةِ</a:t>
@@ -4590,6 +4616,7 @@
                   <a:srgbClr val="1F2A37"/>
                 </a:solidFill>
                 <a:latin typeface="Amiri" pitchFamily="2" charset="-78"/>
+                <a:ea typeface="Amiri" pitchFamily="2" charset="-78"/>
                 <a:cs typeface="Amiri" pitchFamily="2" charset="-78"/>
               </a:rPr>
               <a:t>عَزِيزِي سَلِيمٌ،</a:t>
@@ -4609,6 +4636,7 @@
                   <a:srgbClr val="1F2A37"/>
                 </a:solidFill>
                 <a:latin typeface="Amiri" pitchFamily="2" charset="-78"/>
+                <a:ea typeface="Amiri" pitchFamily="2" charset="-78"/>
                 <a:cs typeface="Amiri" pitchFamily="2" charset="-78"/>
               </a:rPr>
               <a:t>تَحِيَّةً طَيِّبَةً، وَبَعْدُ، فَقَدِ انْتَقَلْنَا أَخِيرًا إِلَى بَيْتِنَا الجَدِيدِ فِي ضَاحِيَةٍ هَادِئَةٍ شَمَالَ المَدِينَةِ. البَيْتُ أَوْسَعُ بِكَثِيرٍ مِنْ شَقَّتِنَا القَدِيمَةِ؛ فَفِي الطَّابِقِ الأَرْضِيِّ يُوجَدُ مَطْبَخٌ حَدِيثٌ يُطِلُّ عَلَى الحَدِيقَةِ، وَفِي الطَّابِقِ الأَوَّلِ تُوجَدُ غُرَفُ النَّوْمِ. أَمَّا غُرْفَتِي فَهِيَ الأَصْغَرُ، لٰكِنَّهَا الأَجْمَلُ، لِأَنَّ نَافِذَتَهَا تُطِلُّ عَلَى شَجَرَةِ تُفَّاحٍ كَبِيرَةٍ. أَمْسِ قَضَيْتُ اليَوْمَ كُلَّهُ أُرَتِّبُ كُتُبِي وَأُعَلِّقُ الصُّوَرَ عَلَى الجُدْرَانِ. صَحِيحٌ أَنَّ البَيْتَ بَعِيدٌ عَنِ المَدْرَسَةِ، غَيْرَ أَنَّ الحَافِلَةَ تَقِفُ أَمَامَهُ. إِذَا زُرْتَنَا فِي الصَّيْفِ، فَسَنَنَامُ فِي خَيْمَةٍ فِي الحَدِيقَةِ!</a:t>
@@ -4628,6 +4656,7 @@
                   <a:srgbClr val="1F2A37"/>
                 </a:solidFill>
                 <a:latin typeface="Amiri" pitchFamily="2" charset="-78"/>
+                <a:ea typeface="Amiri" pitchFamily="2" charset="-78"/>
                 <a:cs typeface="Amiri" pitchFamily="2" charset="-78"/>
               </a:rPr>
               <a:t>مَعَ تَحِيَّاتِي،</a:t>
@@ -4647,6 +4676,7 @@
                   <a:srgbClr val="1F2A37"/>
                 </a:solidFill>
                 <a:latin typeface="Amiri" pitchFamily="2" charset="-78"/>
+                <a:ea typeface="Amiri" pitchFamily="2" charset="-78"/>
                 <a:cs typeface="Amiri" pitchFamily="2" charset="-78"/>
               </a:rPr>
               <a:t>فَارِسٌ</a:t>
@@ -4810,11 +4840,12 @@
               <a:buNone/>
             </a:pPr>
             <a:r>
-              <a:rPr lang="en-US" sz="950" b="1" dirty="0">
+              <a:rPr lang="ar-SA" sz="950" b="1" dirty="0">
                 <a:solidFill>
                   <a:srgbClr val="FFFFFF"/>
                 </a:solidFill>
                 <a:latin typeface="Calibri" pitchFamily="34" charset="0"/>
+                <a:ea typeface="Amiri" pitchFamily="2" charset="-78"/>
                 <a:cs typeface="Amiri" pitchFamily="2" charset="-78"/>
               </a:rPr>
               <a:t>أَوْسَعُ بِكَثِيرٍ مِنْ</a:t>
@@ -4875,11 +4906,12 @@
               <a:buNone/>
             </a:pPr>
             <a:r>
-              <a:rPr lang="en-US" sz="950" b="1" dirty="0">
+              <a:rPr lang="ar-SA" sz="950" b="1" dirty="0">
                 <a:solidFill>
                   <a:srgbClr val="FFFFFF"/>
                 </a:solidFill>
                 <a:latin typeface="Calibri" pitchFamily="34" charset="0"/>
+                <a:ea typeface="Amiri" pitchFamily="2" charset="-78"/>
                 <a:cs typeface="Amiri" pitchFamily="2" charset="-78"/>
               </a:rPr>
               <a:t>أَمَّا غُرْفَتِي فَهِيَ الأَصْغَرُ</a:t>
@@ -4940,11 +4972,12 @@
               <a:buNone/>
             </a:pPr>
             <a:r>
-              <a:rPr lang="en-US" sz="950" b="1" dirty="0">
+              <a:rPr lang="ar-SA" sz="950" b="1" dirty="0">
                 <a:solidFill>
                   <a:srgbClr val="FFFFFF"/>
                 </a:solidFill>
                 <a:latin typeface="Calibri" pitchFamily="34" charset="0"/>
+                <a:ea typeface="Amiri" pitchFamily="2" charset="-78"/>
                 <a:cs typeface="Amiri" pitchFamily="2" charset="-78"/>
               </a:rPr>
               <a:t>قَضَيْتُ اليَوْمَ كُلَّهُ أُرَتِّبُ</a:t>
@@ -5005,11 +5038,12 @@
               <a:buNone/>
             </a:pPr>
             <a:r>
-              <a:rPr lang="en-US" sz="950" b="1" dirty="0">
+              <a:rPr lang="ar-SA" sz="950" b="1" dirty="0">
                 <a:solidFill>
                   <a:srgbClr val="FFFFFF"/>
                 </a:solidFill>
                 <a:latin typeface="Calibri" pitchFamily="34" charset="0"/>
+                <a:ea typeface="Amiri" pitchFamily="2" charset="-78"/>
                 <a:cs typeface="Amiri" pitchFamily="2" charset="-78"/>
               </a:rPr>
               <a:t>إِذَا زُرْتَنَا … فَسَنَنَامُ</a:t>
@@ -5143,6 +5177,7 @@
                   <a:srgbClr val="D4AF37"/>
                 </a:solidFill>
                 <a:latin typeface="Amiri" pitchFamily="2" charset="-78"/>
+                <a:ea typeface="Amiri" pitchFamily="2" charset="-78"/>
                 <a:cs typeface="Amiri" pitchFamily="2" charset="-78"/>
               </a:rPr>
               <a:t>م</a:t>
@@ -5463,6 +5498,7 @@
                   <a:srgbClr val="8A6D1E"/>
                 </a:solidFill>
                 <a:latin typeface="Amiri" pitchFamily="2" charset="-78"/>
+                <a:ea typeface="Amiri" pitchFamily="2" charset="-78"/>
                 <a:cs typeface="Amiri" pitchFamily="2" charset="-78"/>
               </a:rPr>
               <a:t>اخْتَرْ عُنْوَانًا وَاحِدًا</a:t>
@@ -5743,6 +5779,7 @@
                   <a:srgbClr val="1B3B6F"/>
                 </a:solidFill>
                 <a:latin typeface="Amiri" pitchFamily="2" charset="-78"/>
+                <a:ea typeface="Amiri" pitchFamily="2" charset="-78"/>
                 <a:cs typeface="Amiri" pitchFamily="2" charset="-78"/>
               </a:rPr>
               <a:t>بَيْتِي</a:t>
@@ -5781,6 +5818,7 @@
                   <a:srgbClr val="1B3B6F"/>
                 </a:solidFill>
                 <a:latin typeface="Amiri" pitchFamily="2" charset="-78"/>
+                <a:ea typeface="Amiri" pitchFamily="2" charset="-78"/>
                 <a:cs typeface="Amiri" pitchFamily="2" charset="-78"/>
               </a:rPr>
               <a:t>(أ)</a:t>
@@ -5887,6 +5925,7 @@
                   <a:srgbClr val="1B3B6F"/>
                 </a:solidFill>
                 <a:latin typeface="Amiri" pitchFamily="2" charset="-78"/>
+                <a:ea typeface="Amiri" pitchFamily="2" charset="-78"/>
                 <a:cs typeface="Amiri" pitchFamily="2" charset="-78"/>
               </a:rPr>
               <a:t>أَيْنَ تَسْكُنُ؟ وَكَيْفَ بَيْتُكَ؟ · الغُرَفُ وَغُرْفَتُكَ · ذِكْرَى أَوْ عَمَلٌ قُمْتُمْ بِهِ فِي البَيْتِ · رَأْيُكَ وَبَيْتُ أَحْلَامِكَ</a:t>
@@ -6018,6 +6057,7 @@
                   <a:srgbClr val="1B3B6F"/>
                 </a:solidFill>
                 <a:latin typeface="Amiri" pitchFamily="2" charset="-78"/>
+                <a:ea typeface="Amiri" pitchFamily="2" charset="-78"/>
                 <a:cs typeface="Amiri" pitchFamily="2" charset="-78"/>
               </a:rPr>
               <a:t>المَدِينَةُ أَمِ الرِّيفُ؟</a:t>
@@ -6056,6 +6096,7 @@
                   <a:srgbClr val="1B3B6F"/>
                 </a:solidFill>
                 <a:latin typeface="Amiri" pitchFamily="2" charset="-78"/>
+                <a:ea typeface="Amiri" pitchFamily="2" charset="-78"/>
                 <a:cs typeface="Amiri" pitchFamily="2" charset="-78"/>
               </a:rPr>
               <a:t>(ب)</a:t>
@@ -6162,6 +6203,7 @@
                   <a:srgbClr val="1B3B6F"/>
                 </a:solidFill>
                 <a:latin typeface="Amiri" pitchFamily="2" charset="-78"/>
+                <a:ea typeface="Amiri" pitchFamily="2" charset="-78"/>
                 <a:cs typeface="Amiri" pitchFamily="2" charset="-78"/>
               </a:rPr>
               <a:t>أَيْنَ يُفَضِّلُ النَّاسُ أَنْ يَسْكُنُوا؟ · المَاضِي وَالحَاضِرُ · تَجْرِبَةٌ شَخْصِيَّةٌ · رَأْيُكَ وَاقْتِرَاحُكَ</a:t>
@@ -6361,6 +6403,7 @@
                   <a:srgbClr val="D4AF37"/>
                 </a:solidFill>
                 <a:latin typeface="Amiri" pitchFamily="2" charset="-78"/>
+                <a:ea typeface="Amiri" pitchFamily="2" charset="-78"/>
                 <a:cs typeface="Amiri" pitchFamily="2" charset="-78"/>
               </a:rPr>
               <a:t>م</a:t>
@@ -6681,6 +6724,7 @@
                   <a:srgbClr val="8A6D1E"/>
                 </a:solidFill>
                 <a:latin typeface="Amiri" pitchFamily="2" charset="-78"/>
+                <a:ea typeface="Amiri" pitchFamily="2" charset="-78"/>
                 <a:cs typeface="Amiri" pitchFamily="2" charset="-78"/>
               </a:rPr>
               <a:t>خُطَّةُ الكِتَابَةِ</a:t>
@@ -7305,6 +7349,7 @@
                   <a:srgbClr val="1B3B6F"/>
                 </a:solidFill>
                 <a:latin typeface="Amiri" pitchFamily="2" charset="-78"/>
+                <a:ea typeface="Amiri" pitchFamily="2" charset="-78"/>
                 <a:cs typeface="Amiri" pitchFamily="2" charset="-78"/>
               </a:rPr>
               <a:t>يُوجَدُ فِي بَيْتِنَا مَطْبَخٌ كَبِيرٌ.</a:t>
@@ -7404,6 +7449,7 @@
                   <a:srgbClr val="1B3B6F"/>
                 </a:solidFill>
                 <a:latin typeface="Amiri" pitchFamily="2" charset="-78"/>
+                <a:ea typeface="Amiri" pitchFamily="2" charset="-78"/>
                 <a:cs typeface="Amiri" pitchFamily="2" charset="-78"/>
               </a:rPr>
               <a:t>زَرَعْنَا الأَزْهَارَ فِي الحَدِيقَةِ.</a:t>
@@ -7503,6 +7549,7 @@
                   <a:srgbClr val="1B3B6F"/>
                 </a:solidFill>
                 <a:latin typeface="Amiri" pitchFamily="2" charset="-78"/>
+                <a:ea typeface="Amiri" pitchFamily="2" charset="-78"/>
                 <a:cs typeface="Amiri" pitchFamily="2" charset="-78"/>
               </a:rPr>
               <a:t>سَأَسْكُنُ فِي بَيْتٍ قَرِيبٍ مِنَ البَحْرِ.</a:t>
@@ -7664,6 +7711,7 @@
                   <a:srgbClr val="1F2A37"/>
                 </a:solidFill>
                 <a:latin typeface="Amiri" pitchFamily="2" charset="-78"/>
+                <a:ea typeface="Amiri" pitchFamily="2" charset="-78"/>
                 <a:cs typeface="Amiri" pitchFamily="2" charset="-78"/>
               </a:rPr>
               <a:t>أ</a:t>
@@ -7690,6 +7738,7 @@
                   <a:srgbClr val="1F2A37"/>
                 </a:solidFill>
                 <a:latin typeface="Amiri" pitchFamily="2" charset="-78"/>
+                <a:ea typeface="Amiri" pitchFamily="2" charset="-78"/>
                 <a:cs typeface="Amiri" pitchFamily="2" charset="-78"/>
               </a:rPr>
               <a:t>ب</a:t>
@@ -7836,6 +7885,7 @@
                   <a:srgbClr val="D4AF37"/>
                 </a:solidFill>
                 <a:latin typeface="Amiri" pitchFamily="2" charset="-78"/>
+                <a:ea typeface="Amiri" pitchFamily="2" charset="-78"/>
                 <a:cs typeface="Amiri" pitchFamily="2" charset="-78"/>
               </a:rPr>
               <a:t>م</a:t>
@@ -8093,6 +8143,7 @@
                   <a:srgbClr val="8A6D1E"/>
                 </a:solidFill>
                 <a:latin typeface="Amiri" pitchFamily="2" charset="-78"/>
+                <a:ea typeface="Amiri" pitchFamily="2" charset="-78"/>
                 <a:cs typeface="Amiri" pitchFamily="2" charset="-78"/>
               </a:rPr>
               <a:t>أ</a:t>
@@ -8157,6 +8208,7 @@
                   <a:srgbClr val="1B3B6F"/>
                 </a:solidFill>
                 <a:latin typeface="Amiri" pitchFamily="2" charset="-78"/>
+                <a:ea typeface="Amiri" pitchFamily="2" charset="-78"/>
                 <a:cs typeface="Amiri" pitchFamily="2" charset="-78"/>
               </a:rPr>
               <a:t>أ</a:t>
@@ -8208,6 +8260,7 @@
                   <a:srgbClr val="8A6D1E"/>
                 </a:solidFill>
                 <a:latin typeface="Amiri" pitchFamily="2" charset="-78"/>
+                <a:ea typeface="Amiri" pitchFamily="2" charset="-78"/>
                 <a:cs typeface="Amiri" pitchFamily="2" charset="-78"/>
               </a:rPr>
               <a:t>نَمُوذَجُ الإِجَابَةِ</a:t>
@@ -8321,6 +8374,7 @@
                   <a:srgbClr val="1F2A37"/>
                 </a:solidFill>
                 <a:latin typeface="Amiri" pitchFamily="2" charset="-78"/>
+                <a:ea typeface="Amiri" pitchFamily="2" charset="-78"/>
                 <a:cs typeface="Amiri" pitchFamily="2" charset="-78"/>
               </a:rPr>
               <a:t>أَسْكُنُ مَعَ أُسْرَتِي فِي بَيْتٍ قَدِيمٍ فِي وَسَطِ مَدِينَةِ يُورْكَ. البَيْتُ لَيْسَ كَبِيرًا، لٰكِنَّهُ مُرِيحٌ وَدَافِئٌ. فِيهِ ثَلَاثَةُ طَوَابِقَ.</a:t>
@@ -8340,6 +8394,7 @@
                   <a:srgbClr val="1F2A37"/>
                 </a:solidFill>
                 <a:latin typeface="Amiri" pitchFamily="2" charset="-78"/>
+                <a:ea typeface="Amiri" pitchFamily="2" charset="-78"/>
                 <a:cs typeface="Amiri" pitchFamily="2" charset="-78"/>
               </a:rPr>
               <a:t>فِي الطَّابِقِ الأَرْضِيِّ يُوجَدُ مَطْبَخٌ وَغُرْفَةُ جُلُوسٍ. المَطْبَخُ بِجَانِبِ الحَدِيقَةِ، وَنَأْكُلُ فِيهِ كُلَّ يَوْمٍ. فِي الطَّابِقِ الأَوَّلِ تُوجَدُ غُرْفَةُ وَالِدَيَّ وَالحَمَّامُ، وَغُرْفَتِي فِي الطَّابِقِ الثَّانِي تَحْتَ السَّقْفِ. فِي غُرْفَتِي سَرِيرٌ وَمَكْتَبٌ وَخِزَانَةٌ، وَعَلَى الجِدَارِ صُوَرٌ لِلَاعِبِي كُرَةِ القَدَمِ. أُحِبُّ غُرْفَتِي، لِأَنَّهَا هَادِئَةٌ وَدَافِئَةٌ، وَأَقْرَأُ فِيهَا كُلَّ مَسَاءٍ.</a:t>
@@ -8359,6 +8414,7 @@
                   <a:srgbClr val="1F2A37"/>
                 </a:solidFill>
                 <a:latin typeface="Amiri" pitchFamily="2" charset="-78"/>
+                <a:ea typeface="Amiri" pitchFamily="2" charset="-78"/>
                 <a:cs typeface="Amiri" pitchFamily="2" charset="-78"/>
               </a:rPr>
               <a:t>فِي الصَّيْفِ المَاضِي زَرَعْنَا أَزْهَارًا وَطَمَاطِمَ فِي الحَدِيقَةِ. أَبِي وَأَنَا عَمِلْنَا كُلَّ يَوْمٍ، وَكَانَتِ الحَدِيقَةُ جَمِيلَةً جِدًّا فِي آخِرِ الصَّيْفِ. أَكَلْنَا الطَّمَاطِمَ مِنْ حَدِيقَتِنَا!</a:t>
@@ -8378,6 +8434,7 @@
                   <a:srgbClr val="1F2A37"/>
                 </a:solidFill>
                 <a:latin typeface="Amiri" pitchFamily="2" charset="-78"/>
+                <a:ea typeface="Amiri" pitchFamily="2" charset="-78"/>
                 <a:cs typeface="Amiri" pitchFamily="2" charset="-78"/>
               </a:rPr>
               <a:t>فِي رَأْيِي، بَيْتِي جَمِيلٌ، لٰكِنَّهُ صَغِيرٌ قَلِيلًا لِخَمْسَةِ أَشْخَاصٍ. فِي المُسْتَقْبَلِ أُرِيدُ أَنْ أَسْكُنَ فِي بَيْتٍ كَبِيرٍ قَرِيبٍ مِنَ البَحْرِ، فِيهِ حَدِيقَةٌ وَمَسْبَحٌ.</a:t>
@@ -8541,11 +8598,12 @@
               <a:buNone/>
             </a:pPr>
             <a:r>
-              <a:rPr lang="en-US" sz="950" b="1" dirty="0">
+              <a:rPr lang="ar-SA" sz="950" b="1" dirty="0">
                 <a:solidFill>
                   <a:srgbClr val="FFFFFF"/>
                 </a:solidFill>
                 <a:latin typeface="Calibri" pitchFamily="34" charset="0"/>
+                <a:ea typeface="Amiri" pitchFamily="2" charset="-78"/>
                 <a:cs typeface="Amiri" pitchFamily="2" charset="-78"/>
               </a:rPr>
               <a:t>لَيْسَ كَبِيرًا، لٰكِنَّهُ</a:t>
@@ -8606,11 +8664,12 @@
               <a:buNone/>
             </a:pPr>
             <a:r>
-              <a:rPr lang="en-US" sz="950" b="1" dirty="0">
+              <a:rPr lang="ar-SA" sz="950" b="1" dirty="0">
                 <a:solidFill>
                   <a:srgbClr val="FFFFFF"/>
                 </a:solidFill>
                 <a:latin typeface="Calibri" pitchFamily="34" charset="0"/>
+                <a:ea typeface="Amiri" pitchFamily="2" charset="-78"/>
                 <a:cs typeface="Amiri" pitchFamily="2" charset="-78"/>
               </a:rPr>
               <a:t>يُوجَدُ مَطْبَخٌ</a:t>
@@ -8671,11 +8730,12 @@
               <a:buNone/>
             </a:pPr>
             <a:r>
-              <a:rPr lang="en-US" sz="950" b="1" dirty="0">
+              <a:rPr lang="ar-SA" sz="950" b="1" dirty="0">
                 <a:solidFill>
                   <a:srgbClr val="FFFFFF"/>
                 </a:solidFill>
                 <a:latin typeface="Calibri" pitchFamily="34" charset="0"/>
+                <a:ea typeface="Amiri" pitchFamily="2" charset="-78"/>
                 <a:cs typeface="Amiri" pitchFamily="2" charset="-78"/>
               </a:rPr>
               <a:t>تَحْتَ السَّقْفِ</a:t>
@@ -8736,11 +8796,12 @@
               <a:buNone/>
             </a:pPr>
             <a:r>
-              <a:rPr lang="en-US" sz="950" b="1" dirty="0">
+              <a:rPr lang="ar-SA" sz="950" b="1" dirty="0">
                 <a:solidFill>
                   <a:srgbClr val="FFFFFF"/>
                 </a:solidFill>
                 <a:latin typeface="Calibri" pitchFamily="34" charset="0"/>
+                <a:ea typeface="Amiri" pitchFamily="2" charset="-78"/>
                 <a:cs typeface="Amiri" pitchFamily="2" charset="-78"/>
               </a:rPr>
               <a:t>زَرَعْنَا</a:t>
@@ -8874,6 +8935,7 @@
                   <a:srgbClr val="D4AF37"/>
                 </a:solidFill>
                 <a:latin typeface="Amiri" pitchFamily="2" charset="-78"/>
+                <a:ea typeface="Amiri" pitchFamily="2" charset="-78"/>
                 <a:cs typeface="Amiri" pitchFamily="2" charset="-78"/>
               </a:rPr>
               <a:t>م</a:t>
@@ -9131,6 +9193,7 @@
                   <a:srgbClr val="8A6D1E"/>
                 </a:solidFill>
                 <a:latin typeface="Amiri" pitchFamily="2" charset="-78"/>
+                <a:ea typeface="Amiri" pitchFamily="2" charset="-78"/>
                 <a:cs typeface="Amiri" pitchFamily="2" charset="-78"/>
               </a:rPr>
               <a:t>أ</a:t>
@@ -9195,6 +9258,7 @@
                   <a:srgbClr val="1B3B6F"/>
                 </a:solidFill>
                 <a:latin typeface="Amiri" pitchFamily="2" charset="-78"/>
+                <a:ea typeface="Amiri" pitchFamily="2" charset="-78"/>
                 <a:cs typeface="Amiri" pitchFamily="2" charset="-78"/>
               </a:rPr>
               <a:t>أ</a:t>
@@ -9246,6 +9310,7 @@
                   <a:srgbClr val="8A6D1E"/>
                 </a:solidFill>
                 <a:latin typeface="Amiri" pitchFamily="2" charset="-78"/>
+                <a:ea typeface="Amiri" pitchFamily="2" charset="-78"/>
                 <a:cs typeface="Amiri" pitchFamily="2" charset="-78"/>
               </a:rPr>
               <a:t>نَمُوذَجُ الإِجَابَةِ</a:t>
@@ -9359,6 +9424,7 @@
                   <a:srgbClr val="1F2A37"/>
                 </a:solidFill>
                 <a:latin typeface="Amiri" pitchFamily="2" charset="-78"/>
+                <a:ea typeface="Amiri" pitchFamily="2" charset="-78"/>
                 <a:cs typeface="Amiri" pitchFamily="2" charset="-78"/>
               </a:rPr>
               <a:t>لِكُلِّ بَيْتٍ رَائِحَةٌ، وَرَائِحَةُ بَيْتِنَا خَلِيطٌ مِنَ القَهْوَةِ وَالكُتُبِ القَدِيمَةِ. نَسْكُنُ فِي بَيْتٍ حَجَرِيٍّ عُمْرُهُ أَكْثَرُ مِنْ مِئَةِ سَنَةٍ، فِي شَارِعٍ ضَيِّقٍ قَرِيبٍ مِنْ وَسَطِ يُورْكَ، وَلِهٰذَا فَهُوَ لَيْسَ وَاسِعًا، لٰكِنَّ لِكُلِّ زَاوِيَةٍ فِيهِ قِصَّةً، وَلِكُلِّ بَابٍ صَوْتًا نَعْرِفُهُ جَمِيعًا.</a:t>
@@ -9378,6 +9444,7 @@
                   <a:srgbClr val="1F2A37"/>
                 </a:solidFill>
                 <a:latin typeface="Amiri" pitchFamily="2" charset="-78"/>
+                <a:ea typeface="Amiri" pitchFamily="2" charset="-78"/>
                 <a:cs typeface="Amiri" pitchFamily="2" charset="-78"/>
               </a:rPr>
               <a:t>فِي الطَّابِقِ الأَرْضِيِّ يُوجَدُ المَطْبَخُ، وَهُوَ قَلْبُ البَيْتِ؛ فَفِيهِ نَأْكُلُ وَنَدْرُسُ وَنَتَحَدَّثُ. أَمَّا غُرْفَتِي فَفِي الطَّابِقِ الثَّانِي تَحْتَ السَّقْفِ مُبَاشَرَةً، وَفِيهَا نَافِذَةٌ صَغِيرَةٌ أَرَى مِنْهَا أَبْرَاجَ الكَاتِدْرَائِيَّةِ القَدِيمَةِ، وَأَسْمَعُ أَجْرَاسَهَا كُلَّ صَبَاحٍ قَبْلَ أَنْ أَسْتَيْقِظَ.</a:t>
@@ -9397,6 +9464,7 @@
                   <a:srgbClr val="1F2A37"/>
                 </a:solidFill>
                 <a:latin typeface="Amiri" pitchFamily="2" charset="-78"/>
+                <a:ea typeface="Amiri" pitchFamily="2" charset="-78"/>
                 <a:cs typeface="Amiri" pitchFamily="2" charset="-78"/>
               </a:rPr>
               <a:t>لَمْ تَكُنِ الحَدِيقَةُ جَمِيلَةً عِنْدَمَا انْتَقَلْنَا؛ فَقَدْ كَانَتْ مَلِيئَةً بِالأَعْشَابِ وَالحِجَارَةِ. لٰكِنَّنَا قَضَيْنَا الصَّيْفَ المَاضِيَ كُلَّهُ نُنَظِّفُهَا، ثُمَّ زَرَعْنَا فِيهَا الوُرُودَ وَالنَّعْنَاعَ، حَتَّى أَصْبَحَتْ أَجْمَلَ مَكَانٍ فِي البَيْتِ.</a:t>
@@ -9416,6 +9484,7 @@
                   <a:srgbClr val="1F2A37"/>
                 </a:solidFill>
                 <a:latin typeface="Amiri" pitchFamily="2" charset="-78"/>
+                <a:ea typeface="Amiri" pitchFamily="2" charset="-78"/>
                 <a:cs typeface="Amiri" pitchFamily="2" charset="-78"/>
               </a:rPr>
               <a:t>صَحِيحٌ أَنَّ بَيْتَنَا صَغِيرٌ وَبَارِدٌ فِي الشِّتَاءِ، غَيْرَ أَنِّي لَا أَتَخَيَّلُ نَفْسِي فِي مَكَانٍ آخَرَ. وَلَوْ أَصْبَحَ عِنْدِي بَيْتٌ فِي المُسْتَقْبَلِ، لَجَعَلْتُ مَطْبَخَهُ كَبِيرًا مِثْلَ مَطْبَخِ أُمِّي، لِأَنَّ البَيْتَ يَبْدَأُ مِنْ حَوْلِ المَائِدَةِ.</a:t>
@@ -9514,11 +9583,12 @@
               <a:buNone/>
             </a:pPr>
             <a:r>
-              <a:rPr lang="en-US" sz="950" b="1" dirty="0">
+              <a:rPr lang="ar-SA" sz="950" b="1" dirty="0">
                 <a:solidFill>
                   <a:srgbClr val="FFFFFF"/>
                 </a:solidFill>
                 <a:latin typeface="Calibri" pitchFamily="34" charset="0"/>
+                <a:ea typeface="Amiri" pitchFamily="2" charset="-78"/>
                 <a:cs typeface="Amiri" pitchFamily="2" charset="-78"/>
               </a:rPr>
               <a:t>عُمْرُهُ أَكْثَرُ مِنْ مِئَةِ سَنَةٍ</a:t>
@@ -9579,11 +9649,12 @@
               <a:buNone/>
             </a:pPr>
             <a:r>
-              <a:rPr lang="en-US" sz="950" b="1" dirty="0">
+              <a:rPr lang="ar-SA" sz="950" b="1" dirty="0">
                 <a:solidFill>
                   <a:srgbClr val="FFFFFF"/>
                 </a:solidFill>
                 <a:latin typeface="Calibri" pitchFamily="34" charset="0"/>
+                <a:ea typeface="Amiri" pitchFamily="2" charset="-78"/>
                 <a:cs typeface="Amiri" pitchFamily="2" charset="-78"/>
               </a:rPr>
               <a:t>أَمَّا غُرْفَتِي فَفِي</a:t>
@@ -9644,11 +9715,12 @@
               <a:buNone/>
             </a:pPr>
             <a:r>
-              <a:rPr lang="en-US" sz="950" b="1" dirty="0">
+              <a:rPr lang="ar-SA" sz="950" b="1" dirty="0">
                 <a:solidFill>
                   <a:srgbClr val="FFFFFF"/>
                 </a:solidFill>
                 <a:latin typeface="Calibri" pitchFamily="34" charset="0"/>
+                <a:ea typeface="Amiri" pitchFamily="2" charset="-78"/>
                 <a:cs typeface="Amiri" pitchFamily="2" charset="-78"/>
               </a:rPr>
               <a:t>لَمْ تَكُنِ الحَدِيقَةُ جَمِيلَةً</a:t>
@@ -9709,11 +9781,12 @@
               <a:buNone/>
             </a:pPr>
             <a:r>
-              <a:rPr lang="en-US" sz="950" b="1" dirty="0">
+              <a:rPr lang="ar-SA" sz="950" b="1" dirty="0">
                 <a:solidFill>
                   <a:srgbClr val="FFFFFF"/>
                 </a:solidFill>
                 <a:latin typeface="Calibri" pitchFamily="34" charset="0"/>
+                <a:ea typeface="Amiri" pitchFamily="2" charset="-78"/>
                 <a:cs typeface="Amiri" pitchFamily="2" charset="-78"/>
               </a:rPr>
               <a:t>لَوْ أَصْبَحَ … لَجَعَلْتُ</a:t>
@@ -9847,6 +9920,7 @@
                   <a:srgbClr val="D4AF37"/>
                 </a:solidFill>
                 <a:latin typeface="Amiri" pitchFamily="2" charset="-78"/>
+                <a:ea typeface="Amiri" pitchFamily="2" charset="-78"/>
                 <a:cs typeface="Amiri" pitchFamily="2" charset="-78"/>
               </a:rPr>
               <a:t>م</a:t>
@@ -10104,6 +10178,7 @@
                   <a:srgbClr val="8A6D1E"/>
                 </a:solidFill>
                 <a:latin typeface="Amiri" pitchFamily="2" charset="-78"/>
+                <a:ea typeface="Amiri" pitchFamily="2" charset="-78"/>
                 <a:cs typeface="Amiri" pitchFamily="2" charset="-78"/>
               </a:rPr>
               <a:t>ب</a:t>
@@ -10168,6 +10243,7 @@
                   <a:srgbClr val="1B3B6F"/>
                 </a:solidFill>
                 <a:latin typeface="Amiri" pitchFamily="2" charset="-78"/>
+                <a:ea typeface="Amiri" pitchFamily="2" charset="-78"/>
                 <a:cs typeface="Amiri" pitchFamily="2" charset="-78"/>
               </a:rPr>
               <a:t>ب</a:t>
@@ -10219,6 +10295,7 @@
                   <a:srgbClr val="8A6D1E"/>
                 </a:solidFill>
                 <a:latin typeface="Amiri" pitchFamily="2" charset="-78"/>
+                <a:ea typeface="Amiri" pitchFamily="2" charset="-78"/>
                 <a:cs typeface="Amiri" pitchFamily="2" charset="-78"/>
               </a:rPr>
               <a:t>نَمُوذَجُ الإِجَابَةِ</a:t>
@@ -10332,6 +10409,7 @@
                   <a:srgbClr val="1F2A37"/>
                 </a:solidFill>
                 <a:latin typeface="Amiri" pitchFamily="2" charset="-78"/>
+                <a:ea typeface="Amiri" pitchFamily="2" charset="-78"/>
                 <a:cs typeface="Amiri" pitchFamily="2" charset="-78"/>
               </a:rPr>
               <a:t>يَحْلُمُ كَثِيرٌ مِنَ النَّاسِ بِبَيْتٍ هَادِئٍ فِي الرِّيفِ، تُحِيطُ بِهِ الأَشْجَارُ، وَلَا يُسْمَعُ فِيهِ إِلَّا صَوْتُ العَصَافِيرِ، بَيْنَمَا يُفَضِّلُ آخَرُونَ شَقَّةً فِي قَلْبِ المَدِينَةِ، قَرِيبَةً مِنَ العَمَلِ وَالمَدَارِسِ وَالمَحَلَّاتِ.</a:t>
@@ -10351,6 +10429,7 @@
                   <a:srgbClr val="1F2A37"/>
                 </a:solidFill>
                 <a:latin typeface="Amiri" pitchFamily="2" charset="-78"/>
+                <a:ea typeface="Amiri" pitchFamily="2" charset="-78"/>
                 <a:cs typeface="Amiri" pitchFamily="2" charset="-78"/>
               </a:rPr>
               <a:t>فِي المَاضِي كَانَ أَغْلَبُ النَّاسِ يَسْكُنُونَ فِي القُرَى، وَكَانَتْ بُيُوتُهُمْ وَاسِعَةً وَفِيهَا فِنَاءٌ تَجْتَمِعُ فِيهِ العَائِلَةُ، أَمَّا اليَوْمَ فَيَنْتَقِلُ الشَّبَابُ إِلَى المُدُنِ بَحْثًا عَنِ العَمَلِ، فَيَسْكُنُونَ فِي شُقَقٍ صَغِيرَةٍ وَغَالِيَةٍ، وَلَا يَعْرِفُونَ أَحْيَانًا أَسْمَاءَ جِيرَانِهِمْ.</a:t>
@@ -10370,6 +10449,7 @@
                   <a:srgbClr val="1F2A37"/>
                 </a:solidFill>
                 <a:latin typeface="Amiri" pitchFamily="2" charset="-78"/>
+                <a:ea typeface="Amiri" pitchFamily="2" charset="-78"/>
                 <a:cs typeface="Amiri" pitchFamily="2" charset="-78"/>
               </a:rPr>
               <a:t>لَقَدْ جَرَّبْتُ الحَيَاتَيْنِ؛ فَفِي العُطْلَةِ الصَّيْفِيَّةِ قَضَيْتُ شَهْرًا فِي مَزْرَعَةِ خَالِي، فَكُنْتُ أَسْتَيْقِظُ مَعَ الشَّمْسِ، وَأُسَاعِدُهُ فِي الحَقْلِ وَفِي إِطْعَامِ الدَّجَاجِ، وَأَنَامُ مُبَكِّرًا بِدُونِ هَاتِفٍ. شَعَرْتُ بِالرَّاحَةِ، لٰكِنِّي اشْتَقْتُ إِلَى أَصْدِقَائِي وَإِلَى المَكْتَبَةِ القَرِيبَةِ مِنْ بَيْتِنَا.</a:t>
@@ -10389,6 +10469,7 @@
                   <a:srgbClr val="1F2A37"/>
                 </a:solidFill>
                 <a:latin typeface="Amiri" pitchFamily="2" charset="-78"/>
+                <a:ea typeface="Amiri" pitchFamily="2" charset="-78"/>
                 <a:cs typeface="Amiri" pitchFamily="2" charset="-78"/>
               </a:rPr>
               <a:t>صَحِيحٌ أَنَّ الرِّيفَ أَهْدَأُ وَأَنْظَفُ، غَيْرَ أَنَّ المَدِينَةَ تُقَدِّمُ فُرَصًا لِلتَّعْلِيمِ وَالعَمَلِ لَا تُوجَدُ فِي القُرَى. وَلَوْ وَصَلَتِ الخِدْمَاتُ الجَيِّدَةُ إِلَى الأَرْيَافِ، لَبَقِيَ كَثِيرٌ مِنَ الشَّبَابِ فِي قُرَاهُمْ، وَلَخَفَّ الازْدِحَامُ فِي المُدُنِ.</a:t>
@@ -10487,11 +10568,12 @@
               <a:buNone/>
             </a:pPr>
             <a:r>
-              <a:rPr lang="en-US" sz="950" b="1" dirty="0">
+              <a:rPr lang="ar-SA" sz="950" b="1" dirty="0">
                 <a:solidFill>
                   <a:srgbClr val="FFFFFF"/>
                 </a:solidFill>
                 <a:latin typeface="Calibri" pitchFamily="34" charset="0"/>
+                <a:ea typeface="Amiri" pitchFamily="2" charset="-78"/>
                 <a:cs typeface="Amiri" pitchFamily="2" charset="-78"/>
               </a:rPr>
               <a:t>لَا يُسْمَعُ فِيهِ إِلَّا</a:t>
@@ -10552,11 +10634,12 @@
               <a:buNone/>
             </a:pPr>
             <a:r>
-              <a:rPr lang="en-US" sz="950" b="1" dirty="0">
+              <a:rPr lang="ar-SA" sz="950" b="1" dirty="0">
                 <a:solidFill>
                   <a:srgbClr val="FFFFFF"/>
                 </a:solidFill>
                 <a:latin typeface="Calibri" pitchFamily="34" charset="0"/>
+                <a:ea typeface="Amiri" pitchFamily="2" charset="-78"/>
                 <a:cs typeface="Amiri" pitchFamily="2" charset="-78"/>
               </a:rPr>
               <a:t>أَمَّا اليَوْمَ فَيَنْتَقِلُ</a:t>
@@ -10617,11 +10700,12 @@
               <a:buNone/>
             </a:pPr>
             <a:r>
-              <a:rPr lang="en-US" sz="950" b="1" dirty="0">
+              <a:rPr lang="ar-SA" sz="950" b="1" dirty="0">
                 <a:solidFill>
                   <a:srgbClr val="FFFFFF"/>
                 </a:solidFill>
                 <a:latin typeface="Calibri" pitchFamily="34" charset="0"/>
+                <a:ea typeface="Amiri" pitchFamily="2" charset="-78"/>
                 <a:cs typeface="Amiri" pitchFamily="2" charset="-78"/>
               </a:rPr>
               <a:t>فَكُنْتُ أَسْتَيْقِظُ</a:t>
@@ -10682,11 +10766,12 @@
               <a:buNone/>
             </a:pPr>
             <a:r>
-              <a:rPr lang="en-US" sz="950" b="1" dirty="0">
+              <a:rPr lang="ar-SA" sz="950" b="1" dirty="0">
                 <a:solidFill>
                   <a:srgbClr val="FFFFFF"/>
                 </a:solidFill>
                 <a:latin typeface="Calibri" pitchFamily="34" charset="0"/>
+                <a:ea typeface="Amiri" pitchFamily="2" charset="-78"/>
                 <a:cs typeface="Amiri" pitchFamily="2" charset="-78"/>
               </a:rPr>
               <a:t>لَوْ وَصَلَتِ … لَبَقِيَ</a:t>
@@ -10820,6 +10905,7 @@
                   <a:srgbClr val="D4AF37"/>
                 </a:solidFill>
                 <a:latin typeface="Amiri" pitchFamily="2" charset="-78"/>
+                <a:ea typeface="Amiri" pitchFamily="2" charset="-78"/>
                 <a:cs typeface="Amiri" pitchFamily="2" charset="-78"/>
               </a:rPr>
               <a:t>م</a:t>
@@ -11140,6 +11226,7 @@
                   <a:srgbClr val="8A6D1E"/>
                 </a:solidFill>
                 <a:latin typeface="Amiri" pitchFamily="2" charset="-78"/>
+                <a:ea typeface="Amiri" pitchFamily="2" charset="-78"/>
                 <a:cs typeface="Amiri" pitchFamily="2" charset="-78"/>
               </a:rPr>
               <a:t>قَيِّمْ عَمَلَكَ</a:t>
@@ -12384,6 +12471,7 @@
                   <a:srgbClr val="FFFFFF"/>
                 </a:solidFill>
                 <a:latin typeface="Amiri" pitchFamily="2" charset="-78"/>
+                <a:ea typeface="Amiri" pitchFamily="2" charset="-78"/>
                 <a:cs typeface="Amiri" pitchFamily="2" charset="-78"/>
               </a:rPr>
               <a:t>أَحْسَنْتُمْ! إِلَى اللِّقَاءِ</a:t>
@@ -12536,6 +12624,7 @@
                   <a:srgbClr val="D4AF37"/>
                 </a:solidFill>
                 <a:latin typeface="Amiri" pitchFamily="2" charset="-78"/>
+                <a:ea typeface="Amiri" pitchFamily="2" charset="-78"/>
                 <a:cs typeface="Amiri" pitchFamily="2" charset="-78"/>
               </a:rPr>
               <a:t>وَرْشَةُ التَّدْرِيبِ</a:t>
@@ -12669,6 +12758,7 @@
                   <a:srgbClr val="D4AF37"/>
                 </a:solidFill>
                 <a:latin typeface="Amiri" pitchFamily="2" charset="-78"/>
+                <a:ea typeface="Amiri" pitchFamily="2" charset="-78"/>
                 <a:cs typeface="Amiri" pitchFamily="2" charset="-78"/>
               </a:rPr>
               <a:t>م</a:t>
@@ -12989,6 +13079,7 @@
                   <a:srgbClr val="8A6D1E"/>
                 </a:solidFill>
                 <a:latin typeface="Amiri" pitchFamily="2" charset="-78"/>
+                <a:ea typeface="Amiri" pitchFamily="2" charset="-78"/>
                 <a:cs typeface="Amiri" pitchFamily="2" charset="-78"/>
               </a:rPr>
               <a:t>آدَابُ الصَّفِّ</a:t>
@@ -14520,6 +14611,7 @@
                   <a:srgbClr val="D4AF37"/>
                 </a:solidFill>
                 <a:latin typeface="Amiri" pitchFamily="2" charset="-78"/>
+                <a:ea typeface="Amiri" pitchFamily="2" charset="-78"/>
                 <a:cs typeface="Amiri" pitchFamily="2" charset="-78"/>
               </a:rPr>
               <a:t>م</a:t>
@@ -14840,6 +14932,7 @@
                   <a:srgbClr val="8A6D1E"/>
                 </a:solidFill>
                 <a:latin typeface="Amiri" pitchFamily="2" charset="-78"/>
+                <a:ea typeface="Amiri" pitchFamily="2" charset="-78"/>
                 <a:cs typeface="Amiri" pitchFamily="2" charset="-78"/>
               </a:rPr>
               <a:t>خَرِيطَةُ الوَرْشَةِ</a:t>
@@ -15154,6 +15247,7 @@
                   <a:srgbClr val="1B3B6F"/>
                 </a:solidFill>
                 <a:latin typeface="Amiri" pitchFamily="2" charset="-78"/>
+                <a:ea typeface="Amiri" pitchFamily="2" charset="-78"/>
                 <a:cs typeface="Amiri" pitchFamily="2" charset="-78"/>
               </a:rPr>
               <a:t>كَيْفَ</a:t>
@@ -15430,6 +15524,7 @@
                   <a:srgbClr val="1E6B52"/>
                 </a:solidFill>
                 <a:latin typeface="Amiri" pitchFamily="2" charset="-78"/>
+                <a:ea typeface="Amiri" pitchFamily="2" charset="-78"/>
                 <a:cs typeface="Amiri" pitchFamily="2" charset="-78"/>
               </a:rPr>
               <a:t>الاسْتِمَارَةُ</a:t>
@@ -15706,6 +15801,7 @@
                   <a:srgbClr val="1E6B52"/>
                 </a:solidFill>
                 <a:latin typeface="Amiri" pitchFamily="2" charset="-78"/>
+                <a:ea typeface="Amiri" pitchFamily="2" charset="-78"/>
                 <a:cs typeface="Amiri" pitchFamily="2" charset="-78"/>
               </a:rPr>
               <a:t>الرِّسَالَةُ</a:t>
@@ -15982,6 +16078,7 @@
                   <a:srgbClr val="1E6B52"/>
                 </a:solidFill>
                 <a:latin typeface="Amiri" pitchFamily="2" charset="-78"/>
+                <a:ea typeface="Amiri" pitchFamily="2" charset="-78"/>
                 <a:cs typeface="Amiri" pitchFamily="2" charset="-78"/>
               </a:rPr>
               <a:t>المَقَالُ</a:t>
@@ -16258,6 +16355,7 @@
                   <a:srgbClr val="8A6D1E"/>
                 </a:solidFill>
                 <a:latin typeface="Amiri" pitchFamily="2" charset="-78"/>
+                <a:ea typeface="Amiri" pitchFamily="2" charset="-78"/>
                 <a:cs typeface="Amiri" pitchFamily="2" charset="-78"/>
               </a:rPr>
               <a:t>قَيِّمْ</a:t>
@@ -16501,6 +16599,7 @@
                   <a:srgbClr val="D4AF37"/>
                 </a:solidFill>
                 <a:latin typeface="Amiri" pitchFamily="2" charset="-78"/>
+                <a:ea typeface="Amiri" pitchFamily="2" charset="-78"/>
                 <a:cs typeface="Amiri" pitchFamily="2" charset="-78"/>
               </a:rPr>
               <a:t>م</a:t>
@@ -16821,6 +16920,7 @@
                   <a:srgbClr val="8A6D1E"/>
                 </a:solidFill>
                 <a:latin typeface="Amiri" pitchFamily="2" charset="-78"/>
+                <a:ea typeface="Amiri" pitchFamily="2" charset="-78"/>
                 <a:cs typeface="Amiri" pitchFamily="2" charset="-78"/>
               </a:rPr>
               <a:t>امْتِحَانُ الكِتَابَةِ</a:t>
@@ -17445,6 +17545,7 @@
                   <a:srgbClr val="1B3B6F"/>
                 </a:solidFill>
                 <a:latin typeface="Amiri" pitchFamily="2" charset="-78"/>
+                <a:ea typeface="Amiri" pitchFamily="2" charset="-78"/>
                 <a:cs typeface="Amiri" pitchFamily="2" charset="-78"/>
               </a:rPr>
               <a:t>فِي الطَّابِقِ الأَرْضِيِّ يُوجَدُ … وَتُوجَدُ …</a:t>
@@ -17544,6 +17645,7 @@
                   <a:srgbClr val="1B3B6F"/>
                 </a:solidFill>
                 <a:latin typeface="Amiri" pitchFamily="2" charset="-78"/>
+                <a:ea typeface="Amiri" pitchFamily="2" charset="-78"/>
                 <a:cs typeface="Amiri" pitchFamily="2" charset="-78"/>
               </a:rPr>
               <a:t>نَافِذَتُهَا تُطِلُّ عَلَى شَجَرَةٍ كَبِيرَةٍ</a:t>
@@ -17643,6 +17745,7 @@
                   <a:srgbClr val="1B3B6F"/>
                 </a:solidFill>
                 <a:latin typeface="Amiri" pitchFamily="2" charset="-78"/>
+                <a:ea typeface="Amiri" pitchFamily="2" charset="-78"/>
                 <a:cs typeface="Amiri" pitchFamily="2" charset="-78"/>
               </a:rPr>
               <a:t>البَيْتُ أَوْسَعُ بِكَثِيرٍ مِنْ شَقَّتِنَا القَدِيمَةِ</a:t>
@@ -17814,6 +17917,7 @@
                   <a:srgbClr val="D4AF37"/>
                 </a:solidFill>
                 <a:latin typeface="Amiri" pitchFamily="2" charset="-78"/>
+                <a:ea typeface="Amiri" pitchFamily="2" charset="-78"/>
                 <a:cs typeface="Amiri" pitchFamily="2" charset="-78"/>
               </a:rPr>
               <a:t>م</a:t>
@@ -18134,6 +18238,7 @@
                   <a:srgbClr val="8A6D1E"/>
                 </a:solidFill>
                 <a:latin typeface="Amiri" pitchFamily="2" charset="-78"/>
+                <a:ea typeface="Amiri" pitchFamily="2" charset="-78"/>
                 <a:cs typeface="Amiri" pitchFamily="2" charset="-78"/>
               </a:rPr>
               <a:t>اسْتِمَارَةُ تَبَادُلِ البُيُوتِ</a:t>
@@ -18490,6 +18595,7 @@
                   <a:srgbClr val="1B3B6F"/>
                 </a:solidFill>
                 <a:latin typeface="Amiri" pitchFamily="2" charset="-78"/>
+                <a:ea typeface="Amiri" pitchFamily="2" charset="-78"/>
                 <a:cs typeface="Amiri" pitchFamily="2" charset="-78"/>
               </a:rPr>
               <a:t>نَوْعُ السَّكَنِ</a:t>
@@ -18734,6 +18840,7 @@
                   <a:srgbClr val="1B3B6F"/>
                 </a:solidFill>
                 <a:latin typeface="Amiri" pitchFamily="2" charset="-78"/>
+                <a:ea typeface="Amiri" pitchFamily="2" charset="-78"/>
                 <a:cs typeface="Amiri" pitchFamily="2" charset="-78"/>
               </a:rPr>
               <a:t>المَدِينَةُ وَالحَيُّ</a:t>
@@ -18978,6 +19085,7 @@
                   <a:srgbClr val="1B3B6F"/>
                 </a:solidFill>
                 <a:latin typeface="Amiri" pitchFamily="2" charset="-78"/>
+                <a:ea typeface="Amiri" pitchFamily="2" charset="-78"/>
                 <a:cs typeface="Amiri" pitchFamily="2" charset="-78"/>
               </a:rPr>
               <a:t>عَدَدُ غُرَفِ النَّوْمِ</a:t>
@@ -19222,6 +19330,7 @@
                   <a:srgbClr val="1B3B6F"/>
                 </a:solidFill>
                 <a:latin typeface="Amiri" pitchFamily="2" charset="-78"/>
+                <a:ea typeface="Amiri" pitchFamily="2" charset="-78"/>
                 <a:cs typeface="Amiri" pitchFamily="2" charset="-78"/>
               </a:rPr>
               <a:t>هَلْ تُوجَدُ حَدِيقَةٌ؟</a:t>
@@ -19466,6 +19575,7 @@
                   <a:srgbClr val="1B3B6F"/>
                 </a:solidFill>
                 <a:latin typeface="Amiri" pitchFamily="2" charset="-78"/>
+                <a:ea typeface="Amiri" pitchFamily="2" charset="-78"/>
                 <a:cs typeface="Amiri" pitchFamily="2" charset="-78"/>
               </a:rPr>
               <a:t>مَكَانٌ قَرِيبٌ مِنَ البَيْتِ</a:t>
@@ -19710,6 +19820,7 @@
                   <a:srgbClr val="1B3B6F"/>
                 </a:solidFill>
                 <a:latin typeface="Amiri" pitchFamily="2" charset="-78"/>
+                <a:ea typeface="Amiri" pitchFamily="2" charset="-78"/>
                 <a:cs typeface="Amiri" pitchFamily="2" charset="-78"/>
               </a:rPr>
               <a:t>غُرْفَتُكَ المُفَضَّلَةُ</a:t>
@@ -19954,6 +20065,7 @@
                   <a:srgbClr val="1B3B6F"/>
                 </a:solidFill>
                 <a:latin typeface="Amiri" pitchFamily="2" charset="-78"/>
+                <a:ea typeface="Amiri" pitchFamily="2" charset="-78"/>
                 <a:cs typeface="Amiri" pitchFamily="2" charset="-78"/>
               </a:rPr>
               <a:t>شَيْءٌ لَا يُوجَدُ فِي بَيْتِكَ</a:t>
@@ -20133,6 +20245,7 @@
                   <a:srgbClr val="1B3B6F"/>
                 </a:solidFill>
                 <a:latin typeface="Amiri" pitchFamily="2" charset="-78"/>
+                <a:ea typeface="Amiri" pitchFamily="2" charset="-78"/>
                 <a:cs typeface="Amiri" pitchFamily="2" charset="-78"/>
               </a:rPr>
               <a:t>جُمْلَةٌ: لِمَاذَا سَيُحِبُّ الضُّيُوفُ بَيْتَكَ؟</a:t>
@@ -20342,6 +20455,7 @@
                   <a:srgbClr val="D4AF37"/>
                 </a:solidFill>
                 <a:latin typeface="Amiri" pitchFamily="2" charset="-78"/>
+                <a:ea typeface="Amiri" pitchFamily="2" charset="-78"/>
                 <a:cs typeface="Amiri" pitchFamily="2" charset="-78"/>
               </a:rPr>
               <a:t>م</a:t>
@@ -20662,6 +20776,7 @@
                   <a:srgbClr val="8A6D1E"/>
                 </a:solidFill>
                 <a:latin typeface="Amiri" pitchFamily="2" charset="-78"/>
+                <a:ea typeface="Amiri" pitchFamily="2" charset="-78"/>
                 <a:cs typeface="Amiri" pitchFamily="2" charset="-78"/>
               </a:rPr>
               <a:t>نَمُوذَجُ الإِجَابَةِ</a:t>
@@ -20980,6 +21095,7 @@
                   <a:srgbClr val="1B3B6F"/>
                 </a:solidFill>
                 <a:latin typeface="Amiri" pitchFamily="2" charset="-78"/>
+                <a:ea typeface="Amiri" pitchFamily="2" charset="-78"/>
                 <a:cs typeface="Amiri" pitchFamily="2" charset="-78"/>
               </a:rPr>
               <a:t>بَيْتٌ بِطَابِقَيْنِ</a:t>
@@ -21018,6 +21134,7 @@
                   <a:srgbClr val="1B3B6F"/>
                 </a:solidFill>
                 <a:latin typeface="Amiri" pitchFamily="2" charset="-78"/>
+                <a:ea typeface="Amiri" pitchFamily="2" charset="-78"/>
                 <a:cs typeface="Amiri" pitchFamily="2" charset="-78"/>
               </a:rPr>
               <a:t>نَوْعُ السَّكَنِ</a:t>
@@ -21159,6 +21276,7 @@
                   <a:srgbClr val="1B3B6F"/>
                 </a:solidFill>
                 <a:latin typeface="Amiri" pitchFamily="2" charset="-78"/>
+                <a:ea typeface="Amiri" pitchFamily="2" charset="-78"/>
                 <a:cs typeface="Amiri" pitchFamily="2" charset="-78"/>
               </a:rPr>
               <a:t>يُورْكُ، وَسَطُ المَدِينَةِ</a:t>
@@ -21197,6 +21315,7 @@
                   <a:srgbClr val="1B3B6F"/>
                 </a:solidFill>
                 <a:latin typeface="Amiri" pitchFamily="2" charset="-78"/>
+                <a:ea typeface="Amiri" pitchFamily="2" charset="-78"/>
                 <a:cs typeface="Amiri" pitchFamily="2" charset="-78"/>
               </a:rPr>
               <a:t>المَدِينَةُ وَالحَيُّ</a:t>
@@ -21338,6 +21457,7 @@
                   <a:srgbClr val="1B3B6F"/>
                 </a:solidFill>
                 <a:latin typeface="Amiri" pitchFamily="2" charset="-78"/>
+                <a:ea typeface="Amiri" pitchFamily="2" charset="-78"/>
                 <a:cs typeface="Amiri" pitchFamily="2" charset="-78"/>
               </a:rPr>
               <a:t>ثَلَاثُ غُرَفٍ</a:t>
@@ -21376,6 +21496,7 @@
                   <a:srgbClr val="1B3B6F"/>
                 </a:solidFill>
                 <a:latin typeface="Amiri" pitchFamily="2" charset="-78"/>
+                <a:ea typeface="Amiri" pitchFamily="2" charset="-78"/>
                 <a:cs typeface="Amiri" pitchFamily="2" charset="-78"/>
               </a:rPr>
               <a:t>عَدَدُ غُرَفِ النَّوْمِ</a:t>
@@ -21517,6 +21638,7 @@
                   <a:srgbClr val="1B3B6F"/>
                 </a:solidFill>
                 <a:latin typeface="Amiri" pitchFamily="2" charset="-78"/>
+                <a:ea typeface="Amiri" pitchFamily="2" charset="-78"/>
                 <a:cs typeface="Amiri" pitchFamily="2" charset="-78"/>
               </a:rPr>
               <a:t>نَعَمْ، حَدِيقَةٌ صَغِيرَةٌ خَلْفَ البَيْتِ</a:t>
@@ -21555,6 +21677,7 @@
                   <a:srgbClr val="1B3B6F"/>
                 </a:solidFill>
                 <a:latin typeface="Amiri" pitchFamily="2" charset="-78"/>
+                <a:ea typeface="Amiri" pitchFamily="2" charset="-78"/>
                 <a:cs typeface="Amiri" pitchFamily="2" charset="-78"/>
               </a:rPr>
               <a:t>هَلْ تُوجَدُ حَدِيقَةٌ؟</a:t>
@@ -21696,6 +21819,7 @@
                   <a:srgbClr val="1B3B6F"/>
                 </a:solidFill>
                 <a:latin typeface="Amiri" pitchFamily="2" charset="-78"/>
+                <a:ea typeface="Amiri" pitchFamily="2" charset="-78"/>
                 <a:cs typeface="Amiri" pitchFamily="2" charset="-78"/>
               </a:rPr>
               <a:t>مَحَطَّةُ القِطَارِ</a:t>
@@ -21734,6 +21858,7 @@
                   <a:srgbClr val="1B3B6F"/>
                 </a:solidFill>
                 <a:latin typeface="Amiri" pitchFamily="2" charset="-78"/>
+                <a:ea typeface="Amiri" pitchFamily="2" charset="-78"/>
                 <a:cs typeface="Amiri" pitchFamily="2" charset="-78"/>
               </a:rPr>
               <a:t>مَكَانٌ قَرِيبٌ مِنَ البَيْتِ</a:t>
@@ -21875,6 +22000,7 @@
                   <a:srgbClr val="1B3B6F"/>
                 </a:solidFill>
                 <a:latin typeface="Amiri" pitchFamily="2" charset="-78"/>
+                <a:ea typeface="Amiri" pitchFamily="2" charset="-78"/>
                 <a:cs typeface="Amiri" pitchFamily="2" charset="-78"/>
               </a:rPr>
               <a:t>المَطْبَخُ</a:t>
@@ -21913,6 +22039,7 @@
                   <a:srgbClr val="1B3B6F"/>
                 </a:solidFill>
                 <a:latin typeface="Amiri" pitchFamily="2" charset="-78"/>
+                <a:ea typeface="Amiri" pitchFamily="2" charset="-78"/>
                 <a:cs typeface="Amiri" pitchFamily="2" charset="-78"/>
               </a:rPr>
               <a:t>غُرْفَتُكَ المُفَضَّلَةُ</a:t>
@@ -22054,6 +22181,7 @@
                   <a:srgbClr val="1B3B6F"/>
                 </a:solidFill>
                 <a:latin typeface="Amiri" pitchFamily="2" charset="-78"/>
+                <a:ea typeface="Amiri" pitchFamily="2" charset="-78"/>
                 <a:cs typeface="Amiri" pitchFamily="2" charset="-78"/>
               </a:rPr>
               <a:t>لَا يُوجَدُ مَوْقِفٌ لِلسَّيَّارَةِ</a:t>
@@ -22092,6 +22220,7 @@
                   <a:srgbClr val="1B3B6F"/>
                 </a:solidFill>
                 <a:latin typeface="Amiri" pitchFamily="2" charset="-78"/>
+                <a:ea typeface="Amiri" pitchFamily="2" charset="-78"/>
                 <a:cs typeface="Amiri" pitchFamily="2" charset="-78"/>
               </a:rPr>
               <a:t>شَيْءٌ لَا يُوجَدُ فِي بَيْتِكَ</a:t>
@@ -22233,6 +22362,7 @@
                   <a:srgbClr val="1B3B6F"/>
                 </a:solidFill>
                 <a:latin typeface="Amiri" pitchFamily="2" charset="-78"/>
+                <a:ea typeface="Amiri" pitchFamily="2" charset="-78"/>
                 <a:cs typeface="Amiri" pitchFamily="2" charset="-78"/>
               </a:rPr>
               <a:t>سَيُحِبُّونَهُ لِأَنَّهُ هَادِئٌ وَقَرِيبٌ مِنَ المَعَالِمِ التَّارِيخِيَّةِ.</a:t>
@@ -22271,6 +22401,7 @@
                   <a:srgbClr val="1B3B6F"/>
                 </a:solidFill>
                 <a:latin typeface="Amiri" pitchFamily="2" charset="-78"/>
+                <a:ea typeface="Amiri" pitchFamily="2" charset="-78"/>
                 <a:cs typeface="Amiri" pitchFamily="2" charset="-78"/>
               </a:rPr>
               <a:t>جُمْلَةٌ: لِمَاذَا سَيُحِبُّ الضُّيُوفُ بَيْتَكَ؟</a:t>
@@ -22480,6 +22611,7 @@
                   <a:srgbClr val="D4AF37"/>
                 </a:solidFill>
                 <a:latin typeface="Amiri" pitchFamily="2" charset="-78"/>
+                <a:ea typeface="Amiri" pitchFamily="2" charset="-78"/>
                 <a:cs typeface="Amiri" pitchFamily="2" charset="-78"/>
               </a:rPr>
               <a:t>م</a:t>
@@ -22800,6 +22932,7 @@
                   <a:srgbClr val="8A6D1E"/>
                 </a:solidFill>
                 <a:latin typeface="Amiri" pitchFamily="2" charset="-78"/>
+                <a:ea typeface="Amiri" pitchFamily="2" charset="-78"/>
                 <a:cs typeface="Amiri" pitchFamily="2" charset="-78"/>
               </a:rPr>
               <a:t>رِسَالَةٌ عَنْ بَيْتِنَا الجَدِيدِ</a:t>
@@ -23275,6 +23408,7 @@
                   <a:srgbClr val="1B3B6F"/>
                 </a:solidFill>
                 <a:latin typeface="Amiri" pitchFamily="2" charset="-78"/>
+                <a:ea typeface="Amiri" pitchFamily="2" charset="-78"/>
                 <a:cs typeface="Amiri" pitchFamily="2" charset="-78"/>
               </a:rPr>
               <a:t>انْتَقَلْنَا إِلَى …</a:t>
@@ -23351,6 +23485,7 @@
                   <a:srgbClr val="1B3B6F"/>
                 </a:solidFill>
                 <a:latin typeface="Amiri" pitchFamily="2" charset="-78"/>
+                <a:ea typeface="Amiri" pitchFamily="2" charset="-78"/>
                 <a:cs typeface="Amiri" pitchFamily="2" charset="-78"/>
               </a:rPr>
               <a:t>يُوجَدُ … وَتُوجَدُ …</a:t>
@@ -23427,6 +23562,7 @@
                   <a:srgbClr val="1B3B6F"/>
                 </a:solidFill>
                 <a:latin typeface="Amiri" pitchFamily="2" charset="-78"/>
+                <a:ea typeface="Amiri" pitchFamily="2" charset="-78"/>
                 <a:cs typeface="Amiri" pitchFamily="2" charset="-78"/>
               </a:rPr>
               <a:t>غُرْفَتِي بِجَانِبِ …</a:t>
@@ -23503,6 +23639,7 @@
                   <a:srgbClr val="1B3B6F"/>
                 </a:solidFill>
                 <a:latin typeface="Amiri" pitchFamily="2" charset="-78"/>
+                <a:ea typeface="Amiri" pitchFamily="2" charset="-78"/>
                 <a:cs typeface="Amiri" pitchFamily="2" charset="-78"/>
               </a:rPr>
               <a:t>إِذَا زُرْتَنَا، فَسَنَنَامُ …</a:t>
@@ -23674,6 +23811,7 @@
                   <a:srgbClr val="D4AF37"/>
                 </a:solidFill>
                 <a:latin typeface="Amiri" pitchFamily="2" charset="-78"/>
+                <a:ea typeface="Amiri" pitchFamily="2" charset="-78"/>
                 <a:cs typeface="Amiri" pitchFamily="2" charset="-78"/>
               </a:rPr>
               <a:t>م</a:t>
@@ -23994,6 +24132,7 @@
                   <a:srgbClr val="8A6D1E"/>
                 </a:solidFill>
                 <a:latin typeface="Amiri" pitchFamily="2" charset="-78"/>
+                <a:ea typeface="Amiri" pitchFamily="2" charset="-78"/>
                 <a:cs typeface="Amiri" pitchFamily="2" charset="-78"/>
               </a:rPr>
               <a:t>نَصُّ السُّؤَالِ</a:t>
@@ -24274,6 +24413,7 @@
                   <a:srgbClr val="1B3B6F"/>
                 </a:solidFill>
                 <a:latin typeface="Amiri" pitchFamily="2" charset="-78"/>
+                <a:ea typeface="Amiri" pitchFamily="2" charset="-78"/>
                 <a:cs typeface="Amiri" pitchFamily="2" charset="-78"/>
               </a:rPr>
               <a:t>انْتَقَلَتْ أُسْرَتُكَ إِلَى بَيْتٍ جَدِيدٍ. اكْتُبْ رِسَالَةً إِلَى صَدِيقِكَ (٨٠–٩٠ كَلِمَةً).</a:t>
@@ -24415,6 +24555,7 @@
                   <a:srgbClr val="1B3B6F"/>
                 </a:solidFill>
                 <a:latin typeface="Amiri" pitchFamily="2" charset="-78"/>
+                <a:ea typeface="Amiri" pitchFamily="2" charset="-78"/>
                 <a:cs typeface="Amiri" pitchFamily="2" charset="-78"/>
               </a:rPr>
               <a:t>أَيْنَ البَيْتُ الجَدِيدُ؟ وَكَيْفَ هُوَ؟</a:t>
@@ -24556,6 +24697,7 @@
                   <a:srgbClr val="1B3B6F"/>
                 </a:solidFill>
                 <a:latin typeface="Amiri" pitchFamily="2" charset="-78"/>
+                <a:ea typeface="Amiri" pitchFamily="2" charset="-78"/>
                 <a:cs typeface="Amiri" pitchFamily="2" charset="-78"/>
               </a:rPr>
               <a:t>صِفِ الغُرَفَ. أَيْنَ غُرْفَتُكَ؟</a:t>
@@ -24697,6 +24839,7 @@
                   <a:srgbClr val="1B3B6F"/>
                 </a:solidFill>
                 <a:latin typeface="Amiri" pitchFamily="2" charset="-78"/>
+                <a:ea typeface="Amiri" pitchFamily="2" charset="-78"/>
                 <a:cs typeface="Amiri" pitchFamily="2" charset="-78"/>
               </a:rPr>
               <a:t>مَاذَا فَعَلْتَ أَمْسِ فِي البَيْتِ الجَدِيدِ؟</a:t>
@@ -24838,6 +24981,7 @@
                   <a:srgbClr val="1B3B6F"/>
                 </a:solidFill>
                 <a:latin typeface="Amiri" pitchFamily="2" charset="-78"/>
+                <a:ea typeface="Amiri" pitchFamily="2" charset="-78"/>
                 <a:cs typeface="Amiri" pitchFamily="2" charset="-78"/>
               </a:rPr>
               <a:t>مَا الشَّيْءُ الَّذِي لَا تُحِبُّهُ؟ ادْعُ صَدِيقَكَ لِلزِّيَارَةِ.</a:t>
@@ -25047,6 +25191,7 @@
                   <a:srgbClr val="D4AF37"/>
                 </a:solidFill>
                 <a:latin typeface="Amiri" pitchFamily="2" charset="-78"/>
+                <a:ea typeface="Amiri" pitchFamily="2" charset="-78"/>
                 <a:cs typeface="Amiri" pitchFamily="2" charset="-78"/>
               </a:rPr>
               <a:t>م</a:t>
@@ -25367,6 +25512,7 @@
                   <a:srgbClr val="8A6D1E"/>
                 </a:solidFill>
                 <a:latin typeface="Amiri" pitchFamily="2" charset="-78"/>
+                <a:ea typeface="Amiri" pitchFamily="2" charset="-78"/>
                 <a:cs typeface="Amiri" pitchFamily="2" charset="-78"/>
               </a:rPr>
               <a:t>قَوَالِبُ الكِتَابَةِ</a:t>
@@ -25647,6 +25793,7 @@
                   <a:srgbClr val="1B3B6F"/>
                 </a:solidFill>
                 <a:latin typeface="Amiri" pitchFamily="2" charset="-78"/>
+                <a:ea typeface="Amiri" pitchFamily="2" charset="-78"/>
                 <a:cs typeface="Amiri" pitchFamily="2" charset="-78"/>
               </a:rPr>
               <a:t>مَرْحَبًا يَا ______ ، كَيْفَ حَالُكَ؟</a:t>
@@ -25853,6 +26000,7 @@
                   <a:srgbClr val="1B3B6F"/>
                 </a:solidFill>
                 <a:latin typeface="Amiri" pitchFamily="2" charset="-78"/>
+                <a:ea typeface="Amiri" pitchFamily="2" charset="-78"/>
                 <a:cs typeface="Amiri" pitchFamily="2" charset="-78"/>
               </a:rPr>
               <a:t>انْتَقَلْنَا إِلَى ______ فِي ______ . البَيْتُ ______ .</a:t>
@@ -26059,6 +26207,7 @@
                   <a:srgbClr val="1B3B6F"/>
                 </a:solidFill>
                 <a:latin typeface="Amiri" pitchFamily="2" charset="-78"/>
+                <a:ea typeface="Amiri" pitchFamily="2" charset="-78"/>
                 <a:cs typeface="Amiri" pitchFamily="2" charset="-78"/>
               </a:rPr>
               <a:t>فِي الطَّابِقِ الأَرْضِيِّ يُوجَدُ ______ . غُرْفَتِي بِجَانِبِ ______ .</a:t>
@@ -26265,6 +26414,7 @@
                   <a:srgbClr val="1B3B6F"/>
                 </a:solidFill>
                 <a:latin typeface="Amiri" pitchFamily="2" charset="-78"/>
+                <a:ea typeface="Amiri" pitchFamily="2" charset="-78"/>
                 <a:cs typeface="Amiri" pitchFamily="2" charset="-78"/>
               </a:rPr>
               <a:t>أَمْسِ ______ فِي غُرْفَتِي / فِي الحَدِيقَةِ.</a:t>
@@ -26471,6 +26621,7 @@
                   <a:srgbClr val="1B3B6F"/>
                 </a:solidFill>
                 <a:latin typeface="Amiri" pitchFamily="2" charset="-78"/>
+                <a:ea typeface="Amiri" pitchFamily="2" charset="-78"/>
                 <a:cs typeface="Amiri" pitchFamily="2" charset="-78"/>
               </a:rPr>
               <a:t>لَا أُحِبُّ ______ . فِي الصَّيْفِ سَتَزُورُنَا!</a:t>
@@ -26677,6 +26828,7 @@
                   <a:srgbClr val="1B3B6F"/>
                 </a:solidFill>
                 <a:latin typeface="Amiri" pitchFamily="2" charset="-78"/>
+                <a:ea typeface="Amiri" pitchFamily="2" charset="-78"/>
                 <a:cs typeface="Amiri" pitchFamily="2" charset="-78"/>
               </a:rPr>
               <a:t>مَعَ السَّلَامَةِ، ______</a:t>
@@ -26916,13 +27068,9 @@
     <a:fontScheme name="Office">
       <a:majorFont>
         <a:latin typeface="Calibri Light" panose="020F0302020204030204"/>
-        <a:ea typeface=""/>
-        <a:cs typeface=""/>
-        <a:font script="Jpan" typeface="游ゴシック Light"/>
-        <a:font script="Hang" typeface="맑은 고딕"/>
-        <a:font script="Hans" typeface="等线 Light"/>
-        <a:font script="Hant" typeface="新細明體"/>
-        <a:font script="Arab" typeface="Times New Roman"/>
+        <a:ea typeface="Amiri" pitchFamily="2" charset="-78"/>
+        <a:cs typeface="Amiri" pitchFamily="2" charset="-78"/>
+        <a:font script="Arab" typeface="Amiri"/>
         <a:font script="Hebr" typeface="Times New Roman"/>
         <a:font script="Thai" typeface="Angsana New"/>
         <a:font script="Ethi" typeface="Nyala"/>
@@ -26968,13 +27116,9 @@
       </a:majorFont>
       <a:minorFont>
         <a:latin typeface="Calibri" panose="020F0502020204030204"/>
-        <a:ea typeface=""/>
-        <a:cs typeface=""/>
-        <a:font script="Jpan" typeface="游ゴシック"/>
-        <a:font script="Hang" typeface="맑은 고딕"/>
-        <a:font script="Hans" typeface="等线"/>
-        <a:font script="Hant" typeface="新細明體"/>
-        <a:font script="Arab" typeface="Arial"/>
+        <a:ea typeface="Amiri" pitchFamily="2" charset="-78"/>
+        <a:cs typeface="Amiri" pitchFamily="2" charset="-78"/>
+        <a:font script="Arab" typeface="Amiri"/>
         <a:font script="Hebr" typeface="Arial"/>
         <a:font script="Thai" typeface="Cordia New"/>
         <a:font script="Ethi" typeface="Nyala"/>

--- a/Topic_B/Exam_Practice/TB-L04_Writing_Workshop_My_Home_Rooms_and_Garden.pptx
+++ b/Topic_B/Exam_Practice/TB-L04_Writing_Workshop_My_Home_Rooms_and_Garden.pptx
@@ -3848,7 +3848,7 @@
                 <a:solidFill>
                   <a:srgbClr val="FFFFFF"/>
                 </a:solidFill>
-                <a:latin typeface="Calibri" pitchFamily="34" charset="0"/>
+                <a:latin typeface="Amiri" pitchFamily="2" charset="-78"/>
                 <a:ea typeface="Amiri" pitchFamily="2" charset="-78"/>
                 <a:cs typeface="Amiri" pitchFamily="2" charset="-78"/>
               </a:rPr>
@@ -3914,7 +3914,7 @@
                 <a:solidFill>
                   <a:srgbClr val="FFFFFF"/>
                 </a:solidFill>
-                <a:latin typeface="Calibri" pitchFamily="34" charset="0"/>
+                <a:latin typeface="Amiri" pitchFamily="2" charset="-78"/>
                 <a:ea typeface="Amiri" pitchFamily="2" charset="-78"/>
                 <a:cs typeface="Amiri" pitchFamily="2" charset="-78"/>
               </a:rPr>
@@ -3980,7 +3980,7 @@
                 <a:solidFill>
                   <a:srgbClr val="FFFFFF"/>
                 </a:solidFill>
-                <a:latin typeface="Calibri" pitchFamily="34" charset="0"/>
+                <a:latin typeface="Amiri" pitchFamily="2" charset="-78"/>
                 <a:ea typeface="Amiri" pitchFamily="2" charset="-78"/>
                 <a:cs typeface="Amiri" pitchFamily="2" charset="-78"/>
               </a:rPr>
@@ -4046,7 +4046,7 @@
                 <a:solidFill>
                   <a:srgbClr val="FFFFFF"/>
                 </a:solidFill>
-                <a:latin typeface="Calibri" pitchFamily="34" charset="0"/>
+                <a:latin typeface="Amiri" pitchFamily="2" charset="-78"/>
                 <a:ea typeface="Amiri" pitchFamily="2" charset="-78"/>
                 <a:cs typeface="Amiri" pitchFamily="2" charset="-78"/>
               </a:rPr>
@@ -4844,7 +4844,7 @@
                 <a:solidFill>
                   <a:srgbClr val="FFFFFF"/>
                 </a:solidFill>
-                <a:latin typeface="Calibri" pitchFamily="34" charset="0"/>
+                <a:latin typeface="Amiri" pitchFamily="2" charset="-78"/>
                 <a:ea typeface="Amiri" pitchFamily="2" charset="-78"/>
                 <a:cs typeface="Amiri" pitchFamily="2" charset="-78"/>
               </a:rPr>
@@ -4910,7 +4910,7 @@
                 <a:solidFill>
                   <a:srgbClr val="FFFFFF"/>
                 </a:solidFill>
-                <a:latin typeface="Calibri" pitchFamily="34" charset="0"/>
+                <a:latin typeface="Amiri" pitchFamily="2" charset="-78"/>
                 <a:ea typeface="Amiri" pitchFamily="2" charset="-78"/>
                 <a:cs typeface="Amiri" pitchFamily="2" charset="-78"/>
               </a:rPr>
@@ -4976,7 +4976,7 @@
                 <a:solidFill>
                   <a:srgbClr val="FFFFFF"/>
                 </a:solidFill>
-                <a:latin typeface="Calibri" pitchFamily="34" charset="0"/>
+                <a:latin typeface="Amiri" pitchFamily="2" charset="-78"/>
                 <a:ea typeface="Amiri" pitchFamily="2" charset="-78"/>
                 <a:cs typeface="Amiri" pitchFamily="2" charset="-78"/>
               </a:rPr>
@@ -5042,7 +5042,7 @@
                 <a:solidFill>
                   <a:srgbClr val="FFFFFF"/>
                 </a:solidFill>
-                <a:latin typeface="Calibri" pitchFamily="34" charset="0"/>
+                <a:latin typeface="Amiri" pitchFamily="2" charset="-78"/>
                 <a:ea typeface="Amiri" pitchFamily="2" charset="-78"/>
                 <a:cs typeface="Amiri" pitchFamily="2" charset="-78"/>
               </a:rPr>
@@ -8602,7 +8602,7 @@
                 <a:solidFill>
                   <a:srgbClr val="FFFFFF"/>
                 </a:solidFill>
-                <a:latin typeface="Calibri" pitchFamily="34" charset="0"/>
+                <a:latin typeface="Amiri" pitchFamily="2" charset="-78"/>
                 <a:ea typeface="Amiri" pitchFamily="2" charset="-78"/>
                 <a:cs typeface="Amiri" pitchFamily="2" charset="-78"/>
               </a:rPr>
@@ -8668,7 +8668,7 @@
                 <a:solidFill>
                   <a:srgbClr val="FFFFFF"/>
                 </a:solidFill>
-                <a:latin typeface="Calibri" pitchFamily="34" charset="0"/>
+                <a:latin typeface="Amiri" pitchFamily="2" charset="-78"/>
                 <a:ea typeface="Amiri" pitchFamily="2" charset="-78"/>
                 <a:cs typeface="Amiri" pitchFamily="2" charset="-78"/>
               </a:rPr>
@@ -8734,7 +8734,7 @@
                 <a:solidFill>
                   <a:srgbClr val="FFFFFF"/>
                 </a:solidFill>
-                <a:latin typeface="Calibri" pitchFamily="34" charset="0"/>
+                <a:latin typeface="Amiri" pitchFamily="2" charset="-78"/>
                 <a:ea typeface="Amiri" pitchFamily="2" charset="-78"/>
                 <a:cs typeface="Amiri" pitchFamily="2" charset="-78"/>
               </a:rPr>
@@ -8800,7 +8800,7 @@
                 <a:solidFill>
                   <a:srgbClr val="FFFFFF"/>
                 </a:solidFill>
-                <a:latin typeface="Calibri" pitchFamily="34" charset="0"/>
+                <a:latin typeface="Amiri" pitchFamily="2" charset="-78"/>
                 <a:ea typeface="Amiri" pitchFamily="2" charset="-78"/>
                 <a:cs typeface="Amiri" pitchFamily="2" charset="-78"/>
               </a:rPr>
@@ -9587,7 +9587,7 @@
                 <a:solidFill>
                   <a:srgbClr val="FFFFFF"/>
                 </a:solidFill>
-                <a:latin typeface="Calibri" pitchFamily="34" charset="0"/>
+                <a:latin typeface="Amiri" pitchFamily="2" charset="-78"/>
                 <a:ea typeface="Amiri" pitchFamily="2" charset="-78"/>
                 <a:cs typeface="Amiri" pitchFamily="2" charset="-78"/>
               </a:rPr>
@@ -9653,7 +9653,7 @@
                 <a:solidFill>
                   <a:srgbClr val="FFFFFF"/>
                 </a:solidFill>
-                <a:latin typeface="Calibri" pitchFamily="34" charset="0"/>
+                <a:latin typeface="Amiri" pitchFamily="2" charset="-78"/>
                 <a:ea typeface="Amiri" pitchFamily="2" charset="-78"/>
                 <a:cs typeface="Amiri" pitchFamily="2" charset="-78"/>
               </a:rPr>
@@ -9719,7 +9719,7 @@
                 <a:solidFill>
                   <a:srgbClr val="FFFFFF"/>
                 </a:solidFill>
-                <a:latin typeface="Calibri" pitchFamily="34" charset="0"/>
+                <a:latin typeface="Amiri" pitchFamily="2" charset="-78"/>
                 <a:ea typeface="Amiri" pitchFamily="2" charset="-78"/>
                 <a:cs typeface="Amiri" pitchFamily="2" charset="-78"/>
               </a:rPr>
@@ -9785,7 +9785,7 @@
                 <a:solidFill>
                   <a:srgbClr val="FFFFFF"/>
                 </a:solidFill>
-                <a:latin typeface="Calibri" pitchFamily="34" charset="0"/>
+                <a:latin typeface="Amiri" pitchFamily="2" charset="-78"/>
                 <a:ea typeface="Amiri" pitchFamily="2" charset="-78"/>
                 <a:cs typeface="Amiri" pitchFamily="2" charset="-78"/>
               </a:rPr>
@@ -10572,7 +10572,7 @@
                 <a:solidFill>
                   <a:srgbClr val="FFFFFF"/>
                 </a:solidFill>
-                <a:latin typeface="Calibri" pitchFamily="34" charset="0"/>
+                <a:latin typeface="Amiri" pitchFamily="2" charset="-78"/>
                 <a:ea typeface="Amiri" pitchFamily="2" charset="-78"/>
                 <a:cs typeface="Amiri" pitchFamily="2" charset="-78"/>
               </a:rPr>
@@ -10638,7 +10638,7 @@
                 <a:solidFill>
                   <a:srgbClr val="FFFFFF"/>
                 </a:solidFill>
-                <a:latin typeface="Calibri" pitchFamily="34" charset="0"/>
+                <a:latin typeface="Amiri" pitchFamily="2" charset="-78"/>
                 <a:ea typeface="Amiri" pitchFamily="2" charset="-78"/>
                 <a:cs typeface="Amiri" pitchFamily="2" charset="-78"/>
               </a:rPr>
@@ -10704,7 +10704,7 @@
                 <a:solidFill>
                   <a:srgbClr val="FFFFFF"/>
                 </a:solidFill>
-                <a:latin typeface="Calibri" pitchFamily="34" charset="0"/>
+                <a:latin typeface="Amiri" pitchFamily="2" charset="-78"/>
                 <a:ea typeface="Amiri" pitchFamily="2" charset="-78"/>
                 <a:cs typeface="Amiri" pitchFamily="2" charset="-78"/>
               </a:rPr>
@@ -10770,7 +10770,7 @@
                 <a:solidFill>
                   <a:srgbClr val="FFFFFF"/>
                 </a:solidFill>
-                <a:latin typeface="Calibri" pitchFamily="34" charset="0"/>
+                <a:latin typeface="Amiri" pitchFamily="2" charset="-78"/>
                 <a:ea typeface="Amiri" pitchFamily="2" charset="-78"/>
                 <a:cs typeface="Amiri" pitchFamily="2" charset="-78"/>
               </a:rPr>
